--- a/kaysonyao/04_results_and_figures/presentation/DP3_Pipeline_Onboarding.pptx
+++ b/kaysonyao/04_results_and_figures/presentation/DP3_Pipeline_Onboarding.pptx
@@ -21653,7 +21653,7 @@
                   <a:srgbClr val="FFFFFF"/>
                 </a:solidFill>
               </a:rPr>
-              <a:t>Calculate Lead Time in Modeling</a:t>
+              <a:t>Calculate Lead Time in Modeling &amp; Validate Model with foreign Dataset</a:t>
             </a:r>
             <a:endParaRPr lang="en-US" sz="1100" dirty="0"/>
           </a:p>
